--- a/docs/ppt-book/projets/Projet5-Portfolio-CV.pptx
+++ b/docs/ppt-book/projets/Projet5-Portfolio-CV.pptx
@@ -111,19 +111,19 @@
   <p:extLst>
     <p:ext uri="{521415D9-36F7-43E2-AB2F-B90AF26B5E84}">
       <p14:sectionLst xmlns:p14="http://schemas.microsoft.com/office/powerpoint/2010/main">
-        <p14:section name="التعريف" id="{0100ddc8-66c1-f5a1-a2af-d1cb1295200d}">
+        <p14:section name="التعريف" id="{b8068c06-515f-9002-00c6-5dccce1a2155}">
           <p14:sldIdLst>
             <p14:sldId id="256"/>
             <p14:sldId id="257"/>
           </p14:sldIdLst>
         </p14:section>
-        <p14:section name="المهارات" id="{afc52bce-6bc9-424e-1adc-5957977fb18d}">
+        <p14:section name="المهارات" id="{66ae6e55-ac58-402d-ea61-a9fbd0f5286c}">
           <p14:sldIdLst>
             <p14:sldId id="258"/>
             <p14:sldId id="259"/>
           </p14:sldIdLst>
         </p14:section>
-        <p14:section name="التواصل" id="{f38a9ce3-1417-8b43-7112-8dc6331e4366}">
+        <p14:section name="التواصل" id="{11606e38-409b-3a9c-4495-3908248f78c0}">
           <p14:sldIdLst>
             <p14:sldId id="260"/>
           </p14:sldIdLst>
